--- a/MadhvaMinds_UCF_Crime_Phase2_Updated (1).pptx
+++ b/MadhvaMinds_UCF_Crime_Phase2_Updated (1).pptx
@@ -137,6 +137,35 @@
     </p:ext>
   </p:extLst>
 </p:presentation>
+</file>
+
+<file path=ppt/changesInfos/changesInfo1.xml><?xml version="1.0" encoding="utf-8"?>
+<pc:chgInfo xmlns:a="http://schemas.openxmlformats.org/drawingml/2006/main" xmlns:r="http://schemas.openxmlformats.org/officeDocument/2006/relationships" xmlns:ac="http://schemas.microsoft.com/office/drawing/2013/main/command" xmlns:pc="http://schemas.microsoft.com/office/powerpoint/2013/main/command">
+  <pc:docChgLst>
+    <pc:chgData name="Gururaghavendra omkar" userId="59c0cae076dcb472" providerId="LiveId" clId="{3A46E92E-7678-4045-84DF-85BB66AC9C21}"/>
+    <pc:docChg chg="modSld">
+      <pc:chgData name="Gururaghavendra omkar" userId="59c0cae076dcb472" providerId="LiveId" clId="{3A46E92E-7678-4045-84DF-85BB66AC9C21}" dt="2026-09-06T06:32:02.820" v="5" actId="120"/>
+      <pc:docMkLst>
+        <pc:docMk/>
+      </pc:docMkLst>
+      <pc:sldChg chg="modSp mod">
+        <pc:chgData name="Gururaghavendra omkar" userId="59c0cae076dcb472" providerId="LiveId" clId="{3A46E92E-7678-4045-84DF-85BB66AC9C21}" dt="2026-09-06T06:32:02.820" v="5" actId="120"/>
+        <pc:sldMkLst>
+          <pc:docMk/>
+          <pc:sldMk cId="0" sldId="264"/>
+        </pc:sldMkLst>
+        <pc:spChg chg="mod">
+          <ac:chgData name="Gururaghavendra omkar" userId="59c0cae076dcb472" providerId="LiveId" clId="{3A46E92E-7678-4045-84DF-85BB66AC9C21}" dt="2026-09-06T06:32:02.820" v="5" actId="120"/>
+          <ac:spMkLst>
+            <pc:docMk/>
+            <pc:sldMk cId="0" sldId="264"/>
+            <ac:spMk id="18" creationId="{00000000-0000-0000-0000-000000000000}"/>
+          </ac:spMkLst>
+        </pc:spChg>
+      </pc:sldChg>
+    </pc:docChg>
+  </pc:docChgLst>
+</pc:chgInfo>
 </file>
 
 <file path=ppt/notesMasters/notesMaster1.xml><?xml version="1.0" encoding="utf-8"?>
@@ -1421,7 +1450,7 @@
           <a:p>
             <a:fld id="{5BCAD085-E8A6-8845-BD4E-CB4CCA059FC4}" type="datetimeFigureOut">
               <a:rPr lang="en-US" smtClean="0"/>
-              <a:t>9/5/2026</a:t>
+              <a:t>9/6/2026</a:t>
             </a:fld>
             <a:endParaRPr lang="en-US"/>
           </a:p>
@@ -1589,7 +1618,7 @@
           <a:p>
             <a:fld id="{5BCAD085-E8A6-8845-BD4E-CB4CCA059FC4}" type="datetimeFigureOut">
               <a:rPr lang="en-US" smtClean="0"/>
-              <a:t>9/5/2026</a:t>
+              <a:t>9/6/2026</a:t>
             </a:fld>
             <a:endParaRPr lang="en-US"/>
           </a:p>
@@ -1767,7 +1796,7 @@
           <a:p>
             <a:fld id="{5BCAD085-E8A6-8845-BD4E-CB4CCA059FC4}" type="datetimeFigureOut">
               <a:rPr lang="en-US" smtClean="0"/>
-              <a:t>9/5/2026</a:t>
+              <a:t>9/6/2026</a:t>
             </a:fld>
             <a:endParaRPr lang="en-US"/>
           </a:p>
@@ -1935,7 +1964,7 @@
           <a:p>
             <a:fld id="{5BCAD085-E8A6-8845-BD4E-CB4CCA059FC4}" type="datetimeFigureOut">
               <a:rPr lang="en-US" smtClean="0"/>
-              <a:t>9/5/2026</a:t>
+              <a:t>9/6/2026</a:t>
             </a:fld>
             <a:endParaRPr lang="en-US"/>
           </a:p>
@@ -2180,7 +2209,7 @@
           <a:p>
             <a:fld id="{5BCAD085-E8A6-8845-BD4E-CB4CCA059FC4}" type="datetimeFigureOut">
               <a:rPr lang="en-US" smtClean="0"/>
-              <a:t>9/5/2026</a:t>
+              <a:t>9/6/2026</a:t>
             </a:fld>
             <a:endParaRPr lang="en-US"/>
           </a:p>
@@ -2465,7 +2494,7 @@
           <a:p>
             <a:fld id="{5BCAD085-E8A6-8845-BD4E-CB4CCA059FC4}" type="datetimeFigureOut">
               <a:rPr lang="en-US" smtClean="0"/>
-              <a:t>9/5/2026</a:t>
+              <a:t>9/6/2026</a:t>
             </a:fld>
             <a:endParaRPr lang="en-US"/>
           </a:p>
@@ -2884,7 +2913,7 @@
           <a:p>
             <a:fld id="{5BCAD085-E8A6-8845-BD4E-CB4CCA059FC4}" type="datetimeFigureOut">
               <a:rPr lang="en-US" smtClean="0"/>
-              <a:t>9/5/2026</a:t>
+              <a:t>9/6/2026</a:t>
             </a:fld>
             <a:endParaRPr lang="en-US"/>
           </a:p>
@@ -3001,7 +3030,7 @@
           <a:p>
             <a:fld id="{5BCAD085-E8A6-8845-BD4E-CB4CCA059FC4}" type="datetimeFigureOut">
               <a:rPr lang="en-US" smtClean="0"/>
-              <a:t>9/5/2026</a:t>
+              <a:t>9/6/2026</a:t>
             </a:fld>
             <a:endParaRPr lang="en-US"/>
           </a:p>
@@ -3096,7 +3125,7 @@
           <a:p>
             <a:fld id="{5BCAD085-E8A6-8845-BD4E-CB4CCA059FC4}" type="datetimeFigureOut">
               <a:rPr lang="en-US" smtClean="0"/>
-              <a:t>9/5/2026</a:t>
+              <a:t>9/6/2026</a:t>
             </a:fld>
             <a:endParaRPr lang="en-US"/>
           </a:p>
@@ -3371,7 +3400,7 @@
           <a:p>
             <a:fld id="{5BCAD085-E8A6-8845-BD4E-CB4CCA059FC4}" type="datetimeFigureOut">
               <a:rPr lang="en-US" smtClean="0"/>
-              <a:t>9/5/2026</a:t>
+              <a:t>9/6/2026</a:t>
             </a:fld>
             <a:endParaRPr lang="en-US"/>
           </a:p>
@@ -3623,7 +3652,7 @@
           <a:p>
             <a:fld id="{5BCAD085-E8A6-8845-BD4E-CB4CCA059FC4}" type="datetimeFigureOut">
               <a:rPr lang="en-US" smtClean="0"/>
-              <a:t>9/5/2026</a:t>
+              <a:t>9/6/2026</a:t>
             </a:fld>
             <a:endParaRPr lang="en-US"/>
           </a:p>
@@ -3834,7 +3863,7 @@
           <a:p>
             <a:fld id="{5BCAD085-E8A6-8845-BD4E-CB4CCA059FC4}" type="datetimeFigureOut">
               <a:rPr lang="en-US" smtClean="0"/>
-              <a:t>9/5/2026</a:t>
+              <a:t>9/6/2026</a:t>
             </a:fld>
             <a:endParaRPr lang="en-US"/>
           </a:p>
@@ -15826,7 +15855,6 @@
           </a:bodyPr>
           <a:lstStyle/>
           <a:p>
-            <a:pPr algn="l"/>
             <a:r>
               <a:rPr sz="1600" b="0" i="0" dirty="0">
                 <a:solidFill>
